--- a/bja-initial-compartment-pk/BJA_Figures_Japanese.pptx
+++ b/bja-initial-compartment-pk/BJA_Figures_Japanese.pptx
@@ -5505,7 +5505,7 @@
                 <a:gridCol w="2103120"/>
                 <a:gridCol w="2743200"/>
               </a:tblGrid>
-              <a:tr h="822960">
+              <a:tr h="685800">
                 <a:tc>
                   <a:txBody>
                     <a:bodyPr/>
@@ -5599,7 +5599,7 @@
                   </a:tcPr>
                 </a:tc>
               </a:tr>
-              <a:tr h="822960">
+              <a:tr h="685800">
                 <a:tc>
                   <a:txBody>
                     <a:bodyPr/>
@@ -5729,7 +5729,7 @@
                   </a:tcPr>
                 </a:tc>
               </a:tr>
-              <a:tr h="822960">
+              <a:tr h="685800">
                 <a:tc>
                   <a:txBody>
                     <a:bodyPr/>
@@ -5847,7 +5847,7 @@
                   </a:tcPr>
                 </a:tc>
               </a:tr>
-              <a:tr h="822960">
+              <a:tr h="685800">
                 <a:tc>
                   <a:txBody>
                     <a:bodyPr/>
@@ -5989,7 +5989,7 @@
                   </a:tcPr>
                 </a:tc>
               </a:tr>
-              <a:tr h="822960">
+              <a:tr h="685800">
                 <a:tc>
                   <a:txBody>
                     <a:bodyPr/>
@@ -6107,10 +6107,83 @@
                   </a:tcPr>
                 </a:tc>
               </a:tr>
+              <a:tr h="685800">
+                <a:tc>
+                  <a:txBody>
+                    <a:bodyPr/>
+                    <a:lstStyle/>
+                    <a:p/>
+                  </a:txBody>
+                  <a:tcPr/>
+                </a:tc>
+                <a:tc>
+                  <a:txBody>
+                    <a:bodyPr/>
+                    <a:lstStyle/>
+                    <a:p/>
+                  </a:txBody>
+                  <a:tcPr/>
+                </a:tc>
+                <a:tc>
+                  <a:txBody>
+                    <a:bodyPr/>
+                    <a:lstStyle/>
+                    <a:p/>
+                  </a:txBody>
+                  <a:tcPr/>
+                </a:tc>
+                <a:tc>
+                  <a:txBody>
+                    <a:bodyPr/>
+                    <a:lstStyle/>
+                    <a:p/>
+                  </a:txBody>
+                  <a:tcPr/>
+                </a:tc>
+              </a:tr>
             </a:tbl>
           </a:graphicData>
         </a:graphic>
       </p:graphicFrame>
+      <p:sp>
+        <p:nvSpPr>
+          <p:cNvPr id="4" name="TextBox 3"/>
+          <p:cNvSpPr txBox="1"/>
+          <p:nvPr/>
+        </p:nvSpPr>
+        <p:spPr>
+          <a:xfrm>
+            <a:off x="822960" y="5486400"/>
+            <a:ext cx="10515600" cy="640080"/>
+          </a:xfrm>
+          <a:prstGeom prst="rect">
+            <a:avLst/>
+          </a:prstGeom>
+          <a:noFill/>
+        </p:spPr>
+        <p:txBody>
+          <a:bodyPr wrap="square">
+            <a:spAutoFit/>
+          </a:bodyPr>
+          <a:lstStyle/>
+          <a:p>
+            <a:pPr algn="l">
+              <a:defRPr sz="1000" b="0">
+                <a:solidFill>
+                  <a:srgbClr val="9E9E9E"/>
+                </a:solidFill>
+              </a:defRPr>
+            </a:pPr>
+            <a:r>
+              <a:t>注：脊髄くも膜下麻酔（脊椎麻酔）はCSF薬物動態の独自性、少量投与、および主に単回</a:t>
+            </a:r>
+            <a:br/>
+            <a:r>
+              <a:t>投与である手技の性質から、本枠組みから除外した。</a:t>
+            </a:r>
+          </a:p>
+        </p:txBody>
+      </p:sp>
     </p:spTree>
   </p:cSld>
   <p:clrMapOvr>
